--- a/soutenance-dba/export/Soutenance-DBA-MINANG-modele-canva-18.pptx
+++ b/soutenance-dba/export/Soutenance-DBA-MINANG-modele-canva-18.pptx
@@ -4717,7 +4717,7 @@
       <p:grpSpPr/>
       <p:pic>
         <p:nvPicPr>
-          <p:cNvPr id="2" name="Picture 1" descr="fond-01.jpg"/>
+          <p:cNvPr id="2" name="Picture 1" descr="fond-couverture.jpg"/>
           <p:cNvPicPr>
             <a:picLocks noChangeAspect="1"/>
           </p:cNvPicPr>
@@ -4739,119 +4739,343 @@
           </a:prstGeom>
         </p:spPr>
       </p:pic>
-      <p:sp>
-        <p:nvSpPr>
-          <p:cNvPr id="3" name="TextBox 2"/>
-          <p:cNvSpPr txBox="1"/>
-          <p:nvPr/>
-        </p:nvSpPr>
-        <p:spPr>
-          <a:xfrm>
-            <a:off x="7786998" y="393055"/>
-            <a:ext cx="1792112" cy="681715"/>
-          </a:xfrm>
-          <a:prstGeom prst="rect">
-            <a:avLst/>
-          </a:prstGeom>
-          <a:noFill/>
-        </p:spPr>
-        <p:txBody>
-          <a:bodyPr wrap="none" lIns="0" rIns="0" tIns="0" bIns="0" anchor="t">
-            <a:spAutoFit/>
-          </a:bodyPr>
-          <a:lstStyle/>
-          <a:p>
-            <a:pPr algn="l">
-              <a:lnSpc>
-                <a:spcPct val="114583"/>
-              </a:lnSpc>
-            </a:pPr>
-            <a:r>
-              <a:rPr sz="767" b="1">
-                <a:solidFill>
-                  <a:srgbClr val="000000"/>
-                </a:solidFill>
-                <a:latin typeface="Arial"/>
-              </a:rPr>
-              <a:t>Objectif : Analyser comment la</a:t>
-            </a:r>
-          </a:p>
-          <a:p>
-            <a:pPr algn="l">
-              <a:lnSpc>
-                <a:spcPct val="114583"/>
-              </a:lnSpc>
-            </a:pPr>
-            <a:r>
-              <a:rPr sz="767" b="1">
-                <a:solidFill>
-                  <a:srgbClr val="000000"/>
-                </a:solidFill>
-                <a:latin typeface="Arial"/>
-              </a:rPr>
-              <a:t>gouvernance augmentée, intégrant</a:t>
-            </a:r>
-          </a:p>
-          <a:p>
-            <a:pPr algn="l">
-              <a:lnSpc>
-                <a:spcPct val="114583"/>
-              </a:lnSpc>
-            </a:pPr>
-            <a:r>
-              <a:rPr sz="767" b="1">
-                <a:solidFill>
-                  <a:srgbClr val="000000"/>
-                </a:solidFill>
-                <a:latin typeface="Arial"/>
-              </a:rPr>
-              <a:t>IA et intelligence émotionnelle,</a:t>
-            </a:r>
-          </a:p>
-          <a:p>
-            <a:pPr algn="l">
-              <a:lnSpc>
-                <a:spcPct val="114583"/>
-              </a:lnSpc>
-            </a:pPr>
-            <a:r>
-              <a:rPr sz="767" b="1">
-                <a:solidFill>
-                  <a:srgbClr val="000000"/>
-                </a:solidFill>
-                <a:latin typeface="Arial"/>
-              </a:rPr>
-              <a:t>peut répondre aux défis de la</a:t>
-            </a:r>
-          </a:p>
-          <a:p>
-            <a:pPr algn="l">
-              <a:lnSpc>
-                <a:spcPct val="114583"/>
-              </a:lnSpc>
-            </a:pPr>
-            <a:r>
-              <a:rPr sz="767" b="1">
-                <a:solidFill>
-                  <a:srgbClr val="000000"/>
-                </a:solidFill>
-                <a:latin typeface="Arial"/>
-              </a:rPr>
-              <a:t>polycrise gabonaise.</a:t>
-            </a:r>
-          </a:p>
-        </p:txBody>
-      </p:sp>
-      <p:sp>
-        <p:nvSpPr>
-          <p:cNvPr id="4" name="TextBox 3"/>
-          <p:cNvSpPr txBox="1"/>
-          <p:nvPr/>
-        </p:nvSpPr>
-        <p:spPr>
-          <a:xfrm>
-            <a:off x="9659256" y="290610"/>
-            <a:ext cx="2157021" cy="6334390"/>
+      <p:pic>
+        <p:nvPicPr>
+          <p:cNvPr id="3" name="Picture 2" descr="logo-mundiapolis.png"/>
+          <p:cNvPicPr>
+            <a:picLocks noChangeAspect="1"/>
+          </p:cNvPicPr>
+          <p:nvPr/>
+        </p:nvPicPr>
+        <p:blipFill>
+          <a:blip r:embed="rId3"/>
+          <a:stretch>
+            <a:fillRect/>
+          </a:stretch>
+        </p:blipFill>
+        <p:spPr>
+          <a:xfrm>
+            <a:off x="609584" y="440255"/>
+            <a:ext cx="938474" cy="372524"/>
+          </a:xfrm>
+          <a:prstGeom prst="rect">
+            <a:avLst/>
+          </a:prstGeom>
+        </p:spPr>
+      </p:pic>
+      <p:pic>
+        <p:nvPicPr>
+          <p:cNvPr id="4" name="Picture 3" descr="logo-iae-nice.png"/>
+          <p:cNvPicPr>
+            <a:picLocks noChangeAspect="1"/>
+          </p:cNvPicPr>
+          <p:nvPr/>
+        </p:nvPicPr>
+        <p:blipFill>
+          <a:blip r:embed="rId4"/>
+          <a:stretch>
+            <a:fillRect/>
+          </a:stretch>
+        </p:blipFill>
+        <p:spPr>
+          <a:xfrm>
+            <a:off x="1777955" y="440255"/>
+            <a:ext cx="611070" cy="372524"/>
+          </a:xfrm>
+          <a:prstGeom prst="rect">
+            <a:avLst/>
+          </a:prstGeom>
+        </p:spPr>
+      </p:pic>
+      <p:sp>
+        <p:nvSpPr>
+          <p:cNvPr id="5" name="TextBox 4"/>
+          <p:cNvSpPr txBox="1"/>
+          <p:nvPr/>
+        </p:nvSpPr>
+        <p:spPr>
+          <a:xfrm>
+            <a:off x="609584" y="935543"/>
+            <a:ext cx="6017958" cy="152396"/>
+          </a:xfrm>
+          <a:prstGeom prst="rect">
+            <a:avLst/>
+          </a:prstGeom>
+          <a:noFill/>
+        </p:spPr>
+        <p:txBody>
+          <a:bodyPr wrap="none" lIns="0" rIns="0" tIns="0" bIns="0" anchor="t">
+            <a:spAutoFit/>
+          </a:bodyPr>
+          <a:lstStyle/>
+          <a:p>
+            <a:pPr algn="l"/>
+            <a:r>
+              <a:rPr sz="1050" b="1">
+                <a:solidFill>
+                  <a:srgbClr val="1FA8C4"/>
+                </a:solidFill>
+                <a:latin typeface="Arial"/>
+              </a:rPr>
+              <a:t>DOCTORAT DE BUSINESS ADMINISTRATION (DBA)</a:t>
+            </a:r>
+          </a:p>
+        </p:txBody>
+      </p:sp>
+      <p:sp>
+        <p:nvSpPr>
+          <p:cNvPr id="6" name="TextBox 5"/>
+          <p:cNvSpPr txBox="1"/>
+          <p:nvPr/>
+        </p:nvSpPr>
+        <p:spPr>
+          <a:xfrm>
+            <a:off x="609584" y="1223402"/>
+            <a:ext cx="7711249" cy="1015974"/>
+          </a:xfrm>
+          <a:prstGeom prst="rect">
+            <a:avLst/>
+          </a:prstGeom>
+          <a:noFill/>
+        </p:spPr>
+        <p:txBody>
+          <a:bodyPr wrap="none" lIns="0" rIns="0" tIns="0" bIns="0" anchor="t">
+            <a:spAutoFit/>
+          </a:bodyPr>
+          <a:lstStyle/>
+          <a:p>
+            <a:pPr algn="l">
+              <a:lnSpc>
+                <a:spcPct val="100000"/>
+              </a:lnSpc>
+            </a:pPr>
+            <a:r>
+              <a:rPr sz="2000" b="1">
+                <a:solidFill>
+                  <a:srgbClr val="0B2A5B"/>
+                </a:solidFill>
+                <a:latin typeface="Arial"/>
+              </a:rPr>
+              <a:t>Gouvernance augmentée par l'IA et l'IE</a:t>
+            </a:r>
+          </a:p>
+          <a:p>
+            <a:pPr algn="l">
+              <a:lnSpc>
+                <a:spcPct val="100000"/>
+              </a:lnSpc>
+            </a:pPr>
+            <a:r>
+              <a:rPr sz="2000" b="1">
+                <a:solidFill>
+                  <a:srgbClr val="0B2A5B"/>
+                </a:solidFill>
+                <a:latin typeface="Arial"/>
+              </a:rPr>
+              <a:t>dans les EPES au Gabon en situation</a:t>
+            </a:r>
+          </a:p>
+          <a:p>
+            <a:pPr algn="l">
+              <a:lnSpc>
+                <a:spcPct val="100000"/>
+              </a:lnSpc>
+            </a:pPr>
+            <a:r>
+              <a:rPr sz="2000" b="1">
+                <a:solidFill>
+                  <a:srgbClr val="0B2A5B"/>
+                </a:solidFill>
+                <a:latin typeface="Arial"/>
+              </a:rPr>
+              <a:t>de polycrise</a:t>
+            </a:r>
+          </a:p>
+        </p:txBody>
+      </p:sp>
+      <p:sp>
+        <p:nvSpPr>
+          <p:cNvPr id="7" name="TextBox 6"/>
+          <p:cNvSpPr txBox="1"/>
+          <p:nvPr/>
+        </p:nvSpPr>
+        <p:spPr>
+          <a:xfrm>
+            <a:off x="609584" y="2239377"/>
+            <a:ext cx="7711249" cy="203194"/>
+          </a:xfrm>
+          <a:prstGeom prst="rect">
+            <a:avLst/>
+          </a:prstGeom>
+          <a:noFill/>
+        </p:spPr>
+        <p:txBody>
+          <a:bodyPr wrap="none" lIns="0" rIns="0" tIns="0" bIns="0" anchor="t">
+            <a:spAutoFit/>
+          </a:bodyPr>
+          <a:lstStyle/>
+          <a:p>
+            <a:pPr algn="l">
+              <a:lnSpc>
+                <a:spcPct val="110000"/>
+              </a:lnSpc>
+            </a:pPr>
+            <a:r>
+              <a:rPr sz="1200" b="0">
+                <a:solidFill>
+                  <a:srgbClr val="40536E"/>
+                </a:solidFill>
+                <a:latin typeface="Arial"/>
+              </a:rPr>
+              <a:t>Enjeux de performance globale, de responsabilité sociétale et de développement durable</a:t>
+            </a:r>
+          </a:p>
+        </p:txBody>
+      </p:sp>
+      <p:sp>
+        <p:nvSpPr>
+          <p:cNvPr id="8" name="Rectangle 7"/>
+          <p:cNvSpPr/>
+          <p:nvPr/>
+        </p:nvSpPr>
+        <p:spPr>
+          <a:xfrm>
+            <a:off x="609584" y="2539936"/>
+            <a:ext cx="812779" cy="25399"/>
+          </a:xfrm>
+          <a:prstGeom prst="rect">
+            <a:avLst/>
+          </a:prstGeom>
+          <a:solidFill>
+            <a:srgbClr val="1FA8C4"/>
+          </a:solidFill>
+          <a:ln>
+            <a:noFill/>
+          </a:ln>
+          <a:effectLst/>
+        </p:spPr>
+        <p:style>
+          <a:lnRef idx="1">
+            <a:schemeClr val="accent1"/>
+          </a:lnRef>
+          <a:fillRef idx="3">
+            <a:schemeClr val="accent1"/>
+          </a:fillRef>
+          <a:effectRef idx="2">
+            <a:schemeClr val="accent1"/>
+          </a:effectRef>
+          <a:fontRef idx="minor">
+            <a:schemeClr val="lt1"/>
+          </a:fontRef>
+        </p:style>
+        <p:txBody>
+          <a:bodyPr rtlCol="0" anchor="ctr"/>
+          <a:lstStyle/>
+          <a:p>
+            <a:pPr algn="ctr"/>
+          </a:p>
+        </p:txBody>
+      </p:sp>
+      <p:sp>
+        <p:nvSpPr>
+          <p:cNvPr id="9" name="TextBox 8"/>
+          <p:cNvSpPr txBox="1"/>
+          <p:nvPr/>
+        </p:nvSpPr>
+        <p:spPr>
+          <a:xfrm>
+            <a:off x="609584" y="2662700"/>
+            <a:ext cx="5340642" cy="338658"/>
+          </a:xfrm>
+          <a:prstGeom prst="rect">
+            <a:avLst/>
+          </a:prstGeom>
+          <a:noFill/>
+        </p:spPr>
+        <p:txBody>
+          <a:bodyPr wrap="none" lIns="0" rIns="0" tIns="0" bIns="0" anchor="t">
+            <a:spAutoFit/>
+          </a:bodyPr>
+          <a:lstStyle/>
+          <a:p>
+            <a:pPr algn="l"/>
+            <a:r>
+              <a:rPr sz="1850" b="1">
+                <a:solidFill>
+                  <a:srgbClr val="0B2A5B"/>
+                </a:solidFill>
+                <a:latin typeface="Arial"/>
+              </a:rPr>
+              <a:t>Serge Patrick MINANG</a:t>
+            </a:r>
+          </a:p>
+        </p:txBody>
+      </p:sp>
+      <p:sp>
+        <p:nvSpPr>
+          <p:cNvPr id="10" name="TextBox 9"/>
+          <p:cNvSpPr txBox="1"/>
+          <p:nvPr/>
+        </p:nvSpPr>
+        <p:spPr>
+          <a:xfrm>
+            <a:off x="609584" y="3001358"/>
+            <a:ext cx="5509971" cy="423322"/>
+          </a:xfrm>
+          <a:prstGeom prst="rect">
+            <a:avLst/>
+          </a:prstGeom>
+          <a:noFill/>
+        </p:spPr>
+        <p:txBody>
+          <a:bodyPr wrap="none" lIns="0" rIns="0" tIns="0" bIns="0" anchor="t">
+            <a:spAutoFit/>
+          </a:bodyPr>
+          <a:lstStyle/>
+          <a:p>
+            <a:pPr algn="l">
+              <a:lnSpc>
+                <a:spcPct val="140000"/>
+              </a:lnSpc>
+            </a:pPr>
+            <a:r>
+              <a:rPr sz="1000" b="0">
+                <a:solidFill>
+                  <a:srgbClr val="40536E"/>
+                </a:solidFill>
+                <a:latin typeface="Arial"/>
+              </a:rPr>
+              <a:t>Direction de thèse : Pr Jérôme CHABANNE-RIVE</a:t>
+            </a:r>
+          </a:p>
+          <a:p>
+            <a:pPr algn="l">
+              <a:lnSpc>
+                <a:spcPct val="140000"/>
+              </a:lnSpc>
+            </a:pPr>
+            <a:r>
+              <a:rPr sz="1000" b="0">
+                <a:solidFill>
+                  <a:srgbClr val="40536E"/>
+                </a:solidFill>
+                <a:latin typeface="Arial"/>
+              </a:rPr>
+              <a:t>Soutenance publique — 21 décembre 2026</a:t>
+            </a:r>
+          </a:p>
+        </p:txBody>
+      </p:sp>
+      <p:sp>
+        <p:nvSpPr>
+          <p:cNvPr id="11" name="TextBox 10"/>
+          <p:cNvSpPr txBox="1"/>
+          <p:nvPr/>
+        </p:nvSpPr>
+        <p:spPr>
+          <a:xfrm>
+            <a:off x="609584" y="3441613"/>
+            <a:ext cx="6017958" cy="423322"/>
           </a:xfrm>
           <a:prstGeom prst="rect">
             <a:avLst/>
@@ -4866,207 +5090,88 @@
           <a:p>
             <a:pPr algn="l">
               <a:lnSpc>
-                <a:spcPct val="114583"/>
-              </a:lnSpc>
-            </a:pPr>
-            <a:r>
-              <a:rPr sz="799" b="0">
-                <a:solidFill>
-                  <a:srgbClr val="000000"/>
-                </a:solidFill>
-                <a:latin typeface="Arial"/>
-              </a:rPr>
-              <a:t>Doctorant : Serge Patrick MINANG</a:t>
-            </a:r>
-          </a:p>
-          <a:p>
-            <a:pPr algn="l">
-              <a:lnSpc>
-                <a:spcPct val="114583"/>
-              </a:lnSpc>
-            </a:pPr>
-            <a:r>
-              <a:rPr sz="799" b="0">
-                <a:solidFill>
-                  <a:srgbClr val="000000"/>
-                </a:solidFill>
-                <a:latin typeface="Arial"/>
-              </a:rPr>
-              <a:t>Soutenance de thèse doctorale (DBA)</a:t>
-            </a:r>
-          </a:p>
-          <a:p>
-            <a:pPr algn="l">
-              <a:lnSpc>
-                <a:spcPct val="114583"/>
-              </a:lnSpc>
-            </a:pPr>
-            <a:r>
-              <a:rPr sz="799" b="0">
-                <a:solidFill>
-                  <a:srgbClr val="000000"/>
-                </a:solidFill>
-                <a:latin typeface="Arial"/>
-              </a:rPr>
-              <a:t>Directeur de thèse : [à compléter]</a:t>
-            </a:r>
-          </a:p>
-          <a:p>
-            <a:pPr algn="l">
-              <a:lnSpc>
-                <a:spcPct val="114583"/>
-              </a:lnSpc>
-            </a:pPr>
-            <a:r>
-              <a:rPr sz="799" b="0">
-                <a:solidFill>
-                  <a:srgbClr val="000000"/>
-                </a:solidFill>
-                <a:latin typeface="Arial"/>
-              </a:rPr>
-              <a:t>Date de soutenance : [à compléter]</a:t>
-            </a:r>
-          </a:p>
-        </p:txBody>
-      </p:sp>
-      <p:sp>
-        <p:nvSpPr>
-          <p:cNvPr id="5" name="TextBox 4"/>
-          <p:cNvSpPr txBox="1"/>
-          <p:nvPr/>
-        </p:nvSpPr>
-        <p:spPr>
-          <a:xfrm>
-            <a:off x="717532" y="4198164"/>
-            <a:ext cx="1018058" cy="243575"/>
-          </a:xfrm>
-          <a:prstGeom prst="rect">
-            <a:avLst/>
-          </a:prstGeom>
-          <a:noFill/>
-        </p:spPr>
-        <p:txBody>
-          <a:bodyPr wrap="none" lIns="0" rIns="0" tIns="0" bIns="0" anchor="t">
-            <a:spAutoFit/>
-          </a:bodyPr>
-          <a:lstStyle/>
-          <a:p>
-            <a:pPr algn="l">
-              <a:lnSpc>
-                <a:spcPct val="98611"/>
-              </a:lnSpc>
-            </a:pPr>
-            <a:r>
-              <a:rPr sz="751" b="1">
-                <a:solidFill>
-                  <a:srgbClr val="00355E"/>
-                </a:solidFill>
-                <a:latin typeface="Arial"/>
-              </a:rPr>
-              <a:t>Université Paris-Est</a:t>
-            </a:r>
-          </a:p>
-          <a:p>
-            <a:pPr algn="l">
-              <a:lnSpc>
-                <a:spcPct val="98611"/>
-              </a:lnSpc>
-            </a:pPr>
-            <a:r>
-              <a:rPr sz="751" b="1">
-                <a:solidFill>
-                  <a:srgbClr val="00355E"/>
-                </a:solidFill>
-                <a:latin typeface="Arial"/>
-              </a:rPr>
-              <a:t>Créteil</a:t>
-            </a:r>
-          </a:p>
-        </p:txBody>
-      </p:sp>
-      <p:sp>
-        <p:nvSpPr>
-          <p:cNvPr id="6" name="TextBox 5"/>
-          <p:cNvSpPr txBox="1"/>
-          <p:nvPr/>
-        </p:nvSpPr>
-        <p:spPr>
-          <a:xfrm>
-            <a:off x="406389" y="4814732"/>
-            <a:ext cx="8172751" cy="1645827"/>
-          </a:xfrm>
-          <a:prstGeom prst="rect">
-            <a:avLst/>
-          </a:prstGeom>
-          <a:noFill/>
-        </p:spPr>
-        <p:txBody>
-          <a:bodyPr wrap="none" lIns="0" rIns="0" tIns="0" bIns="0" anchor="t">
-            <a:spAutoFit/>
-          </a:bodyPr>
-          <a:lstStyle/>
-          <a:p>
-            <a:pPr algn="l">
-              <a:lnSpc>
-                <a:spcPct val="115473"/>
-              </a:lnSpc>
-            </a:pPr>
-            <a:r>
-              <a:rPr sz="2309" b="0">
-                <a:solidFill>
-                  <a:srgbClr val="00355E"/>
-                </a:solidFill>
-                <a:latin typeface="Arial Black"/>
-              </a:rPr>
-              <a:t>Gouvernance augmentée : articulation de</a:t>
-            </a:r>
-          </a:p>
-          <a:p>
-            <a:pPr algn="l">
-              <a:lnSpc>
-                <a:spcPct val="115473"/>
-              </a:lnSpc>
-            </a:pPr>
-            <a:r>
-              <a:rPr sz="2309" b="0">
-                <a:solidFill>
-                  <a:srgbClr val="00355E"/>
-                </a:solidFill>
-                <a:latin typeface="Arial Black"/>
-              </a:rPr>
-              <a:t>l'intelligence artificielle et de l'intelligence</a:t>
-            </a:r>
-          </a:p>
-          <a:p>
-            <a:pPr algn="l">
-              <a:lnSpc>
-                <a:spcPct val="115473"/>
-              </a:lnSpc>
-            </a:pPr>
-            <a:r>
-              <a:rPr sz="2309" b="0">
-                <a:solidFill>
-                  <a:srgbClr val="00355E"/>
-                </a:solidFill>
-                <a:latin typeface="Arial Black"/>
-              </a:rPr>
-              <a:t>émotionnelle dans le contexte gabonais de</a:t>
-            </a:r>
-          </a:p>
-          <a:p>
-            <a:pPr algn="l">
-              <a:lnSpc>
-                <a:spcPct val="115473"/>
-              </a:lnSpc>
-            </a:pPr>
-            <a:r>
-              <a:rPr sz="2309" b="0">
-                <a:solidFill>
-                  <a:srgbClr val="00355E"/>
-                </a:solidFill>
-                <a:latin typeface="Arial Black"/>
-              </a:rPr>
-              <a:t>polycrise</a:t>
+                <a:spcPct val="140000"/>
+              </a:lnSpc>
+            </a:pPr>
+            <a:r>
+              <a:rPr sz="900" b="1">
+                <a:solidFill>
+                  <a:srgbClr val="1FA8C4"/>
+                </a:solidFill>
+                <a:latin typeface="Arial"/>
+              </a:rPr>
+              <a:t>JURY</a:t>
+            </a:r>
+          </a:p>
+          <a:p>
+            <a:pPr algn="l">
+              <a:lnSpc>
+                <a:spcPct val="140000"/>
+              </a:lnSpc>
+            </a:pPr>
+            <a:r>
+              <a:rPr sz="950" b="0">
+                <a:solidFill>
+                  <a:srgbClr val="40536E"/>
+                </a:solidFill>
+                <a:latin typeface="Arial"/>
+              </a:rPr>
+              <a:t>Marc VALAX (Président) · Jérôme CHABANNE-RIVE (Rapporteur) · Michel PLANE (Suffragant) · Sabrina (Suffragant)</a:t>
+            </a:r>
+          </a:p>
+        </p:txBody>
+      </p:sp>
+      <p:sp>
+        <p:nvSpPr>
+          <p:cNvPr id="12" name="TextBox 11"/>
+          <p:cNvSpPr txBox="1"/>
+          <p:nvPr/>
+        </p:nvSpPr>
+        <p:spPr>
+          <a:xfrm>
+            <a:off x="609584" y="5913818"/>
+            <a:ext cx="6187287" cy="507987"/>
+          </a:xfrm>
+          <a:prstGeom prst="rect">
+            <a:avLst/>
+          </a:prstGeom>
+          <a:noFill/>
+        </p:spPr>
+        <p:txBody>
+          <a:bodyPr wrap="none" lIns="0" rIns="0" tIns="0" bIns="0" anchor="t">
+            <a:spAutoFit/>
+          </a:bodyPr>
+          <a:lstStyle/>
+          <a:p>
+            <a:pPr algn="l">
+              <a:lnSpc>
+                <a:spcPct val="140000"/>
+              </a:lnSpc>
+            </a:pPr>
+            <a:r>
+              <a:rPr sz="900" b="0">
+                <a:solidFill>
+                  <a:srgbClr val="40536E"/>
+                </a:solidFill>
+                <a:latin typeface="Arial"/>
+              </a:rPr>
+              <a:t>contact@upl-gabon.com · +241 02 62 19 78 · Libreville, Gabon</a:t>
+            </a:r>
+          </a:p>
+          <a:p>
+            <a:pPr algn="l">
+              <a:lnSpc>
+                <a:spcPct val="140000"/>
+              </a:lnSpc>
+            </a:pPr>
+            <a:r>
+              <a:rPr sz="850" b="1">
+                <a:solidFill>
+                  <a:srgbClr val="0B2A5B"/>
+                </a:solidFill>
+                <a:latin typeface="Arial"/>
+              </a:rPr>
+              <a:t>EXCELLENCE  •  RESPONSABILITÉ  •  IMPACT</a:t>
             </a:r>
           </a:p>
         </p:txBody>
@@ -8710,6 +8815,84 @@
           </a:p>
         </p:txBody>
       </p:sp>
+      <p:sp>
+        <p:nvSpPr>
+          <p:cNvPr id="9" name="TextBox 8"/>
+          <p:cNvSpPr txBox="1"/>
+          <p:nvPr/>
+        </p:nvSpPr>
+        <p:spPr>
+          <a:xfrm>
+            <a:off x="2446805" y="3567764"/>
+            <a:ext cx="1784731" cy="137156"/>
+          </a:xfrm>
+          <a:prstGeom prst="rect">
+            <a:avLst/>
+          </a:prstGeom>
+          <a:noFill/>
+        </p:spPr>
+        <p:txBody>
+          <a:bodyPr wrap="none" lIns="0" rIns="0" tIns="0" bIns="0" anchor="t">
+            <a:spAutoFit/>
+          </a:bodyPr>
+          <a:lstStyle/>
+          <a:p>
+            <a:pPr algn="ctr">
+              <a:lnSpc>
+                <a:spcPct val="100000"/>
+              </a:lnSpc>
+            </a:pPr>
+            <a:r>
+              <a:rPr sz="1200" b="0">
+                <a:solidFill>
+                  <a:srgbClr val="FFFFFF"/>
+                </a:solidFill>
+                <a:latin typeface="Arial"/>
+              </a:rPr>
+              <a:t>Recherche</a:t>
+            </a:r>
+          </a:p>
+        </p:txBody>
+      </p:sp>
+      <p:sp>
+        <p:nvSpPr>
+          <p:cNvPr id="10" name="TextBox 9"/>
+          <p:cNvSpPr txBox="1"/>
+          <p:nvPr/>
+        </p:nvSpPr>
+        <p:spPr>
+          <a:xfrm>
+            <a:off x="7924601" y="3516965"/>
+            <a:ext cx="1954060" cy="137156"/>
+          </a:xfrm>
+          <a:prstGeom prst="rect">
+            <a:avLst/>
+          </a:prstGeom>
+          <a:noFill/>
+        </p:spPr>
+        <p:txBody>
+          <a:bodyPr wrap="none" lIns="0" rIns="0" tIns="0" bIns="0" anchor="t">
+            <a:spAutoFit/>
+          </a:bodyPr>
+          <a:lstStyle/>
+          <a:p>
+            <a:pPr algn="ctr">
+              <a:lnSpc>
+                <a:spcPct val="100000"/>
+              </a:lnSpc>
+            </a:pPr>
+            <a:r>
+              <a:rPr sz="1200" b="0">
+                <a:solidFill>
+                  <a:srgbClr val="FFFFFF"/>
+                </a:solidFill>
+                <a:latin typeface="Arial"/>
+              </a:rPr>
+              <a:t>Perspectives</a:t>
+            </a:r>
+          </a:p>
+        </p:txBody>
+      </p:sp>
     </p:spTree>
   </p:cSld>
   <p:clrMapOvr>
@@ -10705,7 +10888,7 @@
                 </a:solidFill>
                 <a:latin typeface="Arial"/>
               </a:rPr>
-              <a:t>Comment l'articulation IA–IE transforme-t-elle la gouvernance des EPES gabonais en polycrise, et avec quels effets sur la performance, la RSE et la durabilité ?</a:t>
+              <a:t>Comment l'articulation IA–IE transforme-t-elle la gouvernance des EPES gabonais en polycrise, et quels effets sur la performance, la RSE et la durabilité ?</a:t>
             </a:r>
           </a:p>
         </p:txBody>
@@ -12008,6 +12191,272 @@
           </a:p>
         </p:txBody>
       </p:sp>
+      <p:sp>
+        <p:nvSpPr>
+          <p:cNvPr id="19" name="TextBox 18"/>
+          <p:cNvSpPr txBox="1"/>
+          <p:nvPr/>
+        </p:nvSpPr>
+        <p:spPr>
+          <a:xfrm>
+            <a:off x="897444" y="2520463"/>
+            <a:ext cx="2377382" cy="182875"/>
+          </a:xfrm>
+          <a:prstGeom prst="rect">
+            <a:avLst/>
+          </a:prstGeom>
+          <a:noFill/>
+        </p:spPr>
+        <p:txBody>
+          <a:bodyPr wrap="none" lIns="0" rIns="0" tIns="0" bIns="0" anchor="t">
+            <a:spAutoFit/>
+          </a:bodyPr>
+          <a:lstStyle/>
+          <a:p>
+            <a:pPr algn="ctr">
+              <a:lnSpc>
+                <a:spcPct val="100000"/>
+              </a:lnSpc>
+            </a:pPr>
+            <a:r>
+              <a:rPr sz="1600" b="1">
+                <a:solidFill>
+                  <a:srgbClr val="FFFFFF"/>
+                </a:solidFill>
+                <a:latin typeface="Arial"/>
+              </a:rPr>
+              <a:t>Relation d'agence</a:t>
+            </a:r>
+          </a:p>
+        </p:txBody>
+      </p:sp>
+      <p:sp>
+        <p:nvSpPr>
+          <p:cNvPr id="20" name="TextBox 19"/>
+          <p:cNvSpPr txBox="1"/>
+          <p:nvPr/>
+        </p:nvSpPr>
+        <p:spPr>
+          <a:xfrm>
+            <a:off x="905910" y="3178413"/>
+            <a:ext cx="1107414" cy="120011"/>
+          </a:xfrm>
+          <a:prstGeom prst="rect">
+            <a:avLst/>
+          </a:prstGeom>
+          <a:noFill/>
+        </p:spPr>
+        <p:txBody>
+          <a:bodyPr wrap="none" lIns="0" rIns="0" tIns="0" bIns="0" anchor="t">
+            <a:spAutoFit/>
+          </a:bodyPr>
+          <a:lstStyle/>
+          <a:p>
+            <a:pPr algn="ctr">
+              <a:lnSpc>
+                <a:spcPct val="100000"/>
+              </a:lnSpc>
+            </a:pPr>
+            <a:r>
+              <a:rPr sz="1050" b="1">
+                <a:solidFill>
+                  <a:srgbClr val="0B2F5C"/>
+                </a:solidFill>
+                <a:latin typeface="Arial"/>
+              </a:rPr>
+              <a:t>Mandant</a:t>
+            </a:r>
+          </a:p>
+        </p:txBody>
+      </p:sp>
+      <p:sp>
+        <p:nvSpPr>
+          <p:cNvPr id="21" name="TextBox 20"/>
+          <p:cNvSpPr txBox="1"/>
+          <p:nvPr/>
+        </p:nvSpPr>
+        <p:spPr>
+          <a:xfrm>
+            <a:off x="2243610" y="3178413"/>
+            <a:ext cx="1192079" cy="120011"/>
+          </a:xfrm>
+          <a:prstGeom prst="rect">
+            <a:avLst/>
+          </a:prstGeom>
+          <a:noFill/>
+        </p:spPr>
+        <p:txBody>
+          <a:bodyPr wrap="none" lIns="0" rIns="0" tIns="0" bIns="0" anchor="t">
+            <a:spAutoFit/>
+          </a:bodyPr>
+          <a:lstStyle/>
+          <a:p>
+            <a:pPr algn="ctr">
+              <a:lnSpc>
+                <a:spcPct val="100000"/>
+              </a:lnSpc>
+            </a:pPr>
+            <a:r>
+              <a:rPr sz="1050" b="1">
+                <a:solidFill>
+                  <a:srgbClr val="0B2F5C"/>
+                </a:solidFill>
+                <a:latin typeface="Arial"/>
+              </a:rPr>
+              <a:t>Mandataire</a:t>
+            </a:r>
+          </a:p>
+        </p:txBody>
+      </p:sp>
+      <p:sp>
+        <p:nvSpPr>
+          <p:cNvPr id="22" name="TextBox 21"/>
+          <p:cNvSpPr txBox="1"/>
+          <p:nvPr/>
+        </p:nvSpPr>
+        <p:spPr>
+          <a:xfrm>
+            <a:off x="5765655" y="3615917"/>
+            <a:ext cx="802622" cy="108582"/>
+          </a:xfrm>
+          <a:prstGeom prst="rect">
+            <a:avLst/>
+          </a:prstGeom>
+          <a:noFill/>
+        </p:spPr>
+        <p:txBody>
+          <a:bodyPr wrap="none" lIns="0" rIns="0" tIns="0" bIns="0" anchor="t">
+            <a:spAutoFit/>
+          </a:bodyPr>
+          <a:lstStyle/>
+          <a:p>
+            <a:pPr algn="ctr">
+              <a:lnSpc>
+                <a:spcPct val="100000"/>
+              </a:lnSpc>
+            </a:pPr>
+            <a:r>
+              <a:rPr sz="950" b="1">
+                <a:solidFill>
+                  <a:srgbClr val="FFFFFF"/>
+                </a:solidFill>
+                <a:latin typeface="Arial"/>
+              </a:rPr>
+              <a:t>Interaction</a:t>
+            </a:r>
+          </a:p>
+        </p:txBody>
+      </p:sp>
+      <p:sp>
+        <p:nvSpPr>
+          <p:cNvPr id="23" name="TextBox 22"/>
+          <p:cNvSpPr txBox="1"/>
+          <p:nvPr/>
+        </p:nvSpPr>
+        <p:spPr>
+          <a:xfrm>
+            <a:off x="8957509" y="3668726"/>
+            <a:ext cx="1209012" cy="240023"/>
+          </a:xfrm>
+          <a:prstGeom prst="rect">
+            <a:avLst/>
+          </a:prstGeom>
+          <a:noFill/>
+        </p:spPr>
+        <p:txBody>
+          <a:bodyPr wrap="none" lIns="0" rIns="0" tIns="0" bIns="0" anchor="t">
+            <a:spAutoFit/>
+          </a:bodyPr>
+          <a:lstStyle/>
+          <a:p>
+            <a:pPr algn="ctr">
+              <a:lnSpc>
+                <a:spcPct val="100000"/>
+              </a:lnSpc>
+            </a:pPr>
+            <a:r>
+              <a:rPr sz="1050" b="1">
+                <a:solidFill>
+                  <a:srgbClr val="FFFFFF"/>
+                </a:solidFill>
+                <a:latin typeface="Arial"/>
+              </a:rPr>
+              <a:t>Intelligence</a:t>
+            </a:r>
+          </a:p>
+          <a:p>
+            <a:pPr algn="ctr">
+              <a:lnSpc>
+                <a:spcPct val="100000"/>
+              </a:lnSpc>
+            </a:pPr>
+            <a:r>
+              <a:rPr sz="1050" b="1">
+                <a:solidFill>
+                  <a:srgbClr val="FFFFFF"/>
+                </a:solidFill>
+                <a:latin typeface="Arial"/>
+              </a:rPr>
+              <a:t>artificielle</a:t>
+            </a:r>
+          </a:p>
+        </p:txBody>
+      </p:sp>
+      <p:sp>
+        <p:nvSpPr>
+          <p:cNvPr id="24" name="TextBox 23"/>
+          <p:cNvSpPr txBox="1"/>
+          <p:nvPr/>
+        </p:nvSpPr>
+        <p:spPr>
+          <a:xfrm>
+            <a:off x="10354474" y="3516330"/>
+            <a:ext cx="1005817" cy="240023"/>
+          </a:xfrm>
+          <a:prstGeom prst="rect">
+            <a:avLst/>
+          </a:prstGeom>
+          <a:noFill/>
+        </p:spPr>
+        <p:txBody>
+          <a:bodyPr wrap="none" lIns="0" rIns="0" tIns="0" bIns="0" anchor="t">
+            <a:spAutoFit/>
+          </a:bodyPr>
+          <a:lstStyle/>
+          <a:p>
+            <a:pPr algn="ctr">
+              <a:lnSpc>
+                <a:spcPct val="100000"/>
+              </a:lnSpc>
+            </a:pPr>
+            <a:r>
+              <a:rPr sz="1050" b="1">
+                <a:solidFill>
+                  <a:srgbClr val="FFFFFF"/>
+                </a:solidFill>
+                <a:latin typeface="Arial"/>
+              </a:rPr>
+              <a:t>Intelligence</a:t>
+            </a:r>
+          </a:p>
+          <a:p>
+            <a:pPr algn="ctr">
+              <a:lnSpc>
+                <a:spcPct val="100000"/>
+              </a:lnSpc>
+            </a:pPr>
+            <a:r>
+              <a:rPr sz="1050" b="1">
+                <a:solidFill>
+                  <a:srgbClr val="FFFFFF"/>
+                </a:solidFill>
+                <a:latin typeface="Arial"/>
+              </a:rPr>
+              <a:t>émotionnelle</a:t>
+            </a:r>
+          </a:p>
+        </p:txBody>
+      </p:sp>
     </p:spTree>
   </p:cSld>
   <p:clrMapOvr>
@@ -12585,6 +13034,382 @@
           </a:p>
         </p:txBody>
       </p:sp>
+      <p:sp>
+        <p:nvSpPr>
+          <p:cNvPr id="16" name="TextBox 15"/>
+          <p:cNvSpPr txBox="1"/>
+          <p:nvPr/>
+        </p:nvSpPr>
+        <p:spPr>
+          <a:xfrm>
+            <a:off x="1380032" y="3555487"/>
+            <a:ext cx="1446072" cy="297172"/>
+          </a:xfrm>
+          <a:prstGeom prst="rect">
+            <a:avLst/>
+          </a:prstGeom>
+          <a:noFill/>
+        </p:spPr>
+        <p:txBody>
+          <a:bodyPr wrap="none" lIns="0" rIns="0" tIns="0" bIns="0" anchor="t">
+            <a:spAutoFit/>
+          </a:bodyPr>
+          <a:lstStyle/>
+          <a:p>
+            <a:pPr algn="ctr">
+              <a:lnSpc>
+                <a:spcPct val="100000"/>
+              </a:lnSpc>
+            </a:pPr>
+            <a:r>
+              <a:rPr sz="1300" b="1">
+                <a:solidFill>
+                  <a:srgbClr val="00355E"/>
+                </a:solidFill>
+                <a:latin typeface="Arial"/>
+              </a:rPr>
+              <a:t>Résilience</a:t>
+            </a:r>
+          </a:p>
+          <a:p>
+            <a:pPr algn="ctr">
+              <a:lnSpc>
+                <a:spcPct val="100000"/>
+              </a:lnSpc>
+            </a:pPr>
+            <a:r>
+              <a:rPr sz="1300" b="1">
+                <a:solidFill>
+                  <a:srgbClr val="00355E"/>
+                </a:solidFill>
+                <a:latin typeface="Arial"/>
+              </a:rPr>
+              <a:t>organisationnelle</a:t>
+            </a:r>
+          </a:p>
+        </p:txBody>
+      </p:sp>
+      <p:sp>
+        <p:nvSpPr>
+          <p:cNvPr id="17" name="TextBox 16"/>
+          <p:cNvSpPr txBox="1"/>
+          <p:nvPr/>
+        </p:nvSpPr>
+        <p:spPr>
+          <a:xfrm>
+            <a:off x="5062940" y="2498133"/>
+            <a:ext cx="2123389" cy="142871"/>
+          </a:xfrm>
+          <a:prstGeom prst="rect">
+            <a:avLst/>
+          </a:prstGeom>
+          <a:noFill/>
+        </p:spPr>
+        <p:txBody>
+          <a:bodyPr wrap="none" lIns="0" rIns="0" tIns="0" bIns="0" anchor="t">
+            <a:spAutoFit/>
+          </a:bodyPr>
+          <a:lstStyle/>
+          <a:p>
+            <a:pPr algn="ctr">
+              <a:lnSpc>
+                <a:spcPct val="100000"/>
+              </a:lnSpc>
+            </a:pPr>
+            <a:r>
+              <a:rPr sz="1250" b="1">
+                <a:solidFill>
+                  <a:srgbClr val="00355E"/>
+                </a:solidFill>
+                <a:latin typeface="Arial"/>
+              </a:rPr>
+              <a:t>Capacités dynamiques</a:t>
+            </a:r>
+          </a:p>
+        </p:txBody>
+      </p:sp>
+      <p:sp>
+        <p:nvSpPr>
+          <p:cNvPr id="18" name="TextBox 17"/>
+          <p:cNvSpPr txBox="1"/>
+          <p:nvPr/>
+        </p:nvSpPr>
+        <p:spPr>
+          <a:xfrm>
+            <a:off x="4673483" y="3652217"/>
+            <a:ext cx="684091" cy="171445"/>
+          </a:xfrm>
+          <a:prstGeom prst="rect">
+            <a:avLst/>
+          </a:prstGeom>
+          <a:noFill/>
+        </p:spPr>
+        <p:txBody>
+          <a:bodyPr wrap="none" lIns="0" rIns="0" tIns="0" bIns="0" anchor="t">
+            <a:spAutoFit/>
+          </a:bodyPr>
+          <a:lstStyle/>
+          <a:p>
+            <a:pPr algn="ctr">
+              <a:lnSpc>
+                <a:spcPct val="100000"/>
+              </a:lnSpc>
+            </a:pPr>
+            <a:r>
+              <a:rPr sz="750" b="1">
+                <a:solidFill>
+                  <a:srgbClr val="00355E"/>
+                </a:solidFill>
+                <a:latin typeface="Arial"/>
+              </a:rPr>
+              <a:t>Détecter</a:t>
+            </a:r>
+          </a:p>
+          <a:p>
+            <a:pPr algn="ctr">
+              <a:lnSpc>
+                <a:spcPct val="100000"/>
+              </a:lnSpc>
+            </a:pPr>
+            <a:r>
+              <a:rPr sz="750" b="1">
+                <a:solidFill>
+                  <a:srgbClr val="00355E"/>
+                </a:solidFill>
+                <a:latin typeface="Arial"/>
+              </a:rPr>
+              <a:t>saisir</a:t>
+            </a:r>
+          </a:p>
+        </p:txBody>
+      </p:sp>
+      <p:sp>
+        <p:nvSpPr>
+          <p:cNvPr id="19" name="TextBox 18"/>
+          <p:cNvSpPr txBox="1"/>
+          <p:nvPr/>
+        </p:nvSpPr>
+        <p:spPr>
+          <a:xfrm>
+            <a:off x="6620767" y="3695078"/>
+            <a:ext cx="938085" cy="85722"/>
+          </a:xfrm>
+          <a:prstGeom prst="rect">
+            <a:avLst/>
+          </a:prstGeom>
+          <a:noFill/>
+        </p:spPr>
+        <p:txBody>
+          <a:bodyPr wrap="none" lIns="0" rIns="0" tIns="0" bIns="0" anchor="t">
+            <a:spAutoFit/>
+          </a:bodyPr>
+          <a:lstStyle/>
+          <a:p>
+            <a:pPr algn="ctr">
+              <a:lnSpc>
+                <a:spcPct val="100000"/>
+              </a:lnSpc>
+            </a:pPr>
+            <a:r>
+              <a:rPr sz="750" b="1">
+                <a:solidFill>
+                  <a:srgbClr val="00355E"/>
+                </a:solidFill>
+                <a:latin typeface="Arial"/>
+              </a:rPr>
+              <a:t>Reconfigurer</a:t>
+            </a:r>
+          </a:p>
+        </p:txBody>
+      </p:sp>
+      <p:sp>
+        <p:nvSpPr>
+          <p:cNvPr id="20" name="TextBox 19"/>
+          <p:cNvSpPr txBox="1"/>
+          <p:nvPr/>
+        </p:nvSpPr>
+        <p:spPr>
+          <a:xfrm>
+            <a:off x="1888019" y="2622696"/>
+            <a:ext cx="430098" cy="80007"/>
+          </a:xfrm>
+          <a:prstGeom prst="rect">
+            <a:avLst/>
+          </a:prstGeom>
+          <a:noFill/>
+        </p:spPr>
+        <p:txBody>
+          <a:bodyPr wrap="none" lIns="0" rIns="0" tIns="0" bIns="0" anchor="t">
+            <a:spAutoFit/>
+          </a:bodyPr>
+          <a:lstStyle/>
+          <a:p>
+            <a:pPr algn="ctr">
+              <a:lnSpc>
+                <a:spcPct val="100000"/>
+              </a:lnSpc>
+            </a:pPr>
+            <a:r>
+              <a:rPr sz="700" b="1">
+                <a:solidFill>
+                  <a:srgbClr val="FFFFFF"/>
+                </a:solidFill>
+                <a:latin typeface="Arial"/>
+              </a:rPr>
+              <a:t>Absorber</a:t>
+            </a:r>
+          </a:p>
+        </p:txBody>
+      </p:sp>
+      <p:sp>
+        <p:nvSpPr>
+          <p:cNvPr id="21" name="TextBox 20"/>
+          <p:cNvSpPr txBox="1"/>
+          <p:nvPr/>
+        </p:nvSpPr>
+        <p:spPr>
+          <a:xfrm>
+            <a:off x="1888019" y="4620779"/>
+            <a:ext cx="480896" cy="80007"/>
+          </a:xfrm>
+          <a:prstGeom prst="rect">
+            <a:avLst/>
+          </a:prstGeom>
+          <a:noFill/>
+        </p:spPr>
+        <p:txBody>
+          <a:bodyPr wrap="none" lIns="0" rIns="0" tIns="0" bIns="0" anchor="t">
+            <a:spAutoFit/>
+          </a:bodyPr>
+          <a:lstStyle/>
+          <a:p>
+            <a:pPr algn="ctr">
+              <a:lnSpc>
+                <a:spcPct val="100000"/>
+              </a:lnSpc>
+            </a:pPr>
+            <a:r>
+              <a:rPr sz="700" b="1">
+                <a:solidFill>
+                  <a:srgbClr val="FFFFFF"/>
+                </a:solidFill>
+                <a:latin typeface="Arial"/>
+              </a:rPr>
+              <a:t>S'adapter</a:t>
+            </a:r>
+          </a:p>
+        </p:txBody>
+      </p:sp>
+      <p:sp>
+        <p:nvSpPr>
+          <p:cNvPr id="22" name="TextBox 21"/>
+          <p:cNvSpPr txBox="1"/>
+          <p:nvPr/>
+        </p:nvSpPr>
+        <p:spPr>
+          <a:xfrm>
+            <a:off x="8957509" y="3282444"/>
+            <a:ext cx="870353" cy="182875"/>
+          </a:xfrm>
+          <a:prstGeom prst="rect">
+            <a:avLst/>
+          </a:prstGeom>
+          <a:noFill/>
+        </p:spPr>
+        <p:txBody>
+          <a:bodyPr wrap="none" lIns="0" rIns="0" tIns="0" bIns="0" anchor="t">
+            <a:spAutoFit/>
+          </a:bodyPr>
+          <a:lstStyle/>
+          <a:p>
+            <a:pPr algn="ctr">
+              <a:lnSpc>
+                <a:spcPct val="100000"/>
+              </a:lnSpc>
+            </a:pPr>
+            <a:r>
+              <a:rPr sz="800" b="1">
+                <a:solidFill>
+                  <a:srgbClr val="0B2F5C"/>
+                </a:solidFill>
+                <a:latin typeface="Arial"/>
+              </a:rPr>
+              <a:t>Intelligence</a:t>
+            </a:r>
+          </a:p>
+          <a:p>
+            <a:pPr algn="ctr">
+              <a:lnSpc>
+                <a:spcPct val="100000"/>
+              </a:lnSpc>
+            </a:pPr>
+            <a:r>
+              <a:rPr sz="800" b="1">
+                <a:solidFill>
+                  <a:srgbClr val="0B2F5C"/>
+                </a:solidFill>
+                <a:latin typeface="Arial"/>
+              </a:rPr>
+              <a:t>émotionnelle</a:t>
+            </a:r>
+          </a:p>
+        </p:txBody>
+      </p:sp>
+      <p:sp>
+        <p:nvSpPr>
+          <p:cNvPr id="23" name="TextBox 22"/>
+          <p:cNvSpPr txBox="1"/>
+          <p:nvPr/>
+        </p:nvSpPr>
+        <p:spPr>
+          <a:xfrm>
+            <a:off x="10616934" y="3273978"/>
+            <a:ext cx="904219" cy="182875"/>
+          </a:xfrm>
+          <a:prstGeom prst="rect">
+            <a:avLst/>
+          </a:prstGeom>
+          <a:noFill/>
+        </p:spPr>
+        <p:txBody>
+          <a:bodyPr wrap="none" lIns="0" rIns="0" tIns="0" bIns="0" anchor="t">
+            <a:spAutoFit/>
+          </a:bodyPr>
+          <a:lstStyle/>
+          <a:p>
+            <a:pPr algn="ctr">
+              <a:lnSpc>
+                <a:spcPct val="100000"/>
+              </a:lnSpc>
+            </a:pPr>
+            <a:r>
+              <a:rPr sz="800" b="1">
+                <a:solidFill>
+                  <a:srgbClr val="0B2F5C"/>
+                </a:solidFill>
+                <a:latin typeface="Arial"/>
+              </a:rPr>
+              <a:t>Gouvernance</a:t>
+            </a:r>
+          </a:p>
+          <a:p>
+            <a:pPr algn="ctr">
+              <a:lnSpc>
+                <a:spcPct val="100000"/>
+              </a:lnSpc>
+            </a:pPr>
+            <a:r>
+              <a:rPr sz="800" b="1">
+                <a:solidFill>
+                  <a:srgbClr val="0B2F5C"/>
+                </a:solidFill>
+                <a:latin typeface="Arial"/>
+              </a:rPr>
+              <a:t>résiliente</a:t>
+            </a:r>
+          </a:p>
+        </p:txBody>
+      </p:sp>
     </p:spTree>
   </p:cSld>
   <p:clrMapOvr>
@@ -14002,6 +14827,61 @@
                 <a:latin typeface="Arial"/>
               </a:rPr>
               <a:t>polycrise.</a:t>
+            </a:r>
+          </a:p>
+        </p:txBody>
+      </p:sp>
+      <p:sp>
+        <p:nvSpPr>
+          <p:cNvPr id="9" name="TextBox 8"/>
+          <p:cNvSpPr txBox="1"/>
+          <p:nvPr/>
+        </p:nvSpPr>
+        <p:spPr>
+          <a:xfrm>
+            <a:off x="5130671" y="4630727"/>
+            <a:ext cx="1784731" cy="297172"/>
+          </a:xfrm>
+          <a:prstGeom prst="rect">
+            <a:avLst/>
+          </a:prstGeom>
+          <a:noFill/>
+        </p:spPr>
+        <p:txBody>
+          <a:bodyPr wrap="none" lIns="0" rIns="0" tIns="0" bIns="0" anchor="t">
+            <a:spAutoFit/>
+          </a:bodyPr>
+          <a:lstStyle/>
+          <a:p>
+            <a:pPr algn="ctr">
+              <a:lnSpc>
+                <a:spcPct val="100000"/>
+              </a:lnSpc>
+            </a:pPr>
+            <a:r>
+              <a:rPr sz="1300" b="1">
+                <a:solidFill>
+                  <a:srgbClr val="FFFFFF"/>
+                </a:solidFill>
+                <a:latin typeface="Arial"/>
+              </a:rPr>
+              <a:t>Gouvernance</a:t>
+            </a:r>
+          </a:p>
+          <a:p>
+            <a:pPr algn="ctr">
+              <a:lnSpc>
+                <a:spcPct val="100000"/>
+              </a:lnSpc>
+            </a:pPr>
+            <a:r>
+              <a:rPr sz="1300" b="1">
+                <a:solidFill>
+                  <a:srgbClr val="FFFFFF"/>
+                </a:solidFill>
+                <a:latin typeface="Arial"/>
+              </a:rPr>
+              <a:t>augmentée</a:t>
             </a:r>
           </a:p>
         </p:txBody>
